--- a/slides/aula3.pptx
+++ b/slides/aula3.pptx
@@ -25,9 +25,11 @@
     <p:sldId id="273" r:id="rId19"/>
     <p:sldId id="274" r:id="rId20"/>
     <p:sldId id="275" r:id="rId21"/>
+    <p:sldId id="276" r:id="rId22"/>
+    <p:sldId id="277" r:id="rId23"/>
   </p:sldIdLst>
   <p:notesMasterIdLst>
-    <p:notesMasterId r:id="rId22"/>
+    <p:notesMasterId r:id="rId24"/>
   </p:notesMasterIdLst>
   <p:sldSz cx="9144000" cy="5143500"/>
   <p:notesSz cx="5143500" cy="9144000"/>
@@ -1601,6 +1603,182 @@
             <a:fld id="{F7021451-1387-4CA6-816F-3879F97B5CBC}" type="slidenum">
               <a:rPr lang="en-US"/>
               <a:t>20</a:t>
+            </a:fld>
+            <a:endParaRPr lang="en-US"/>
+          </a:p>
+        </p:txBody>
+      </p:sp>
+    </p:spTree>
+    <p:extLst>
+      <p:ext uri="{BB962C8B-B14F-4D97-AF65-F5344CB8AC3E}">
+        <p14:creationId xmlns:p14="http://schemas.microsoft.com/office/powerpoint/2010/main" val="1024086991"/>
+      </p:ext>
+    </p:extLst>
+  </p:cSld>
+  <p:clrMapOvr>
+    <a:masterClrMapping/>
+  </p:clrMapOvr>
+</p:notes>
+</file>
+
+<file path=ppt/notesSlides/notesSlide21.xml><?xml version="1.0" encoding="utf-8"?>
+<p:notes xmlns:a="http://schemas.openxmlformats.org/drawingml/2006/main" xmlns:r="http://schemas.openxmlformats.org/officeDocument/2006/relationships" xmlns:p="http://schemas.openxmlformats.org/presentationml/2006/main">
+  <p:cSld>
+    <p:spTree>
+      <p:nvGrpSpPr>
+        <p:cNvPr id="1" name=""/>
+        <p:cNvGrpSpPr/>
+        <p:nvPr/>
+      </p:nvGrpSpPr>
+      <p:grpSpPr>
+        <a:xfrm>
+          <a:off x="0" y="0"/>
+          <a:ext cx="0" cy="0"/>
+          <a:chOff x="0" y="0"/>
+          <a:chExt cx="0" cy="0"/>
+        </a:xfrm>
+      </p:grpSpPr>
+      <p:sp>
+        <p:nvSpPr>
+          <p:cNvPr id="2" name="Slide Image Placeholder 1"/>
+          <p:cNvSpPr>
+            <a:spLocks noGrp="1" noRot="1" noChangeAspect="1"/>
+          </p:cNvSpPr>
+          <p:nvPr>
+            <p:ph type="sldImg"/>
+          </p:nvPr>
+        </p:nvSpPr>
+        <p:spPr/>
+      </p:sp>
+      <p:sp>
+        <p:nvSpPr>
+          <p:cNvPr id="3" name="Notes Placeholder 2"/>
+          <p:cNvSpPr>
+            <a:spLocks noGrp="1"/>
+          </p:cNvSpPr>
+          <p:nvPr>
+            <p:ph type="body" idx="1"/>
+          </p:nvPr>
+        </p:nvSpPr>
+        <p:spPr/>
+        <p:txBody>
+          <a:bodyPr/>
+          <a:lstStyle/>
+          <a:p>
+            <a:r>
+              <a:rPr lang="en-US" dirty="0"/>
+              <a:t/>
+            </a:r>
+            <a:endParaRPr lang="en-US" dirty="0"/>
+          </a:p>
+        </p:txBody>
+      </p:sp>
+      <p:sp>
+        <p:nvSpPr>
+          <p:cNvPr id="4" name="Slide Number Placeholder 3"/>
+          <p:cNvSpPr>
+            <a:spLocks noGrp="1"/>
+          </p:cNvSpPr>
+          <p:nvPr>
+            <p:ph type="sldNum" sz="quarter" idx="10"/>
+          </p:nvPr>
+        </p:nvSpPr>
+        <p:spPr/>
+        <p:txBody>
+          <a:bodyPr/>
+          <a:lstStyle/>
+          <a:p>
+            <a:fld id="{F7021451-1387-4CA6-816F-3879F97B5CBC}" type="slidenum">
+              <a:rPr lang="en-US"/>
+              <a:t>21</a:t>
+            </a:fld>
+            <a:endParaRPr lang="en-US"/>
+          </a:p>
+        </p:txBody>
+      </p:sp>
+    </p:spTree>
+    <p:extLst>
+      <p:ext uri="{BB962C8B-B14F-4D97-AF65-F5344CB8AC3E}">
+        <p14:creationId xmlns:p14="http://schemas.microsoft.com/office/powerpoint/2010/main" val="1024086991"/>
+      </p:ext>
+    </p:extLst>
+  </p:cSld>
+  <p:clrMapOvr>
+    <a:masterClrMapping/>
+  </p:clrMapOvr>
+</p:notes>
+</file>
+
+<file path=ppt/notesSlides/notesSlide22.xml><?xml version="1.0" encoding="utf-8"?>
+<p:notes xmlns:a="http://schemas.openxmlformats.org/drawingml/2006/main" xmlns:r="http://schemas.openxmlformats.org/officeDocument/2006/relationships" xmlns:p="http://schemas.openxmlformats.org/presentationml/2006/main">
+  <p:cSld>
+    <p:spTree>
+      <p:nvGrpSpPr>
+        <p:cNvPr id="1" name=""/>
+        <p:cNvGrpSpPr/>
+        <p:nvPr/>
+      </p:nvGrpSpPr>
+      <p:grpSpPr>
+        <a:xfrm>
+          <a:off x="0" y="0"/>
+          <a:ext cx="0" cy="0"/>
+          <a:chOff x="0" y="0"/>
+          <a:chExt cx="0" cy="0"/>
+        </a:xfrm>
+      </p:grpSpPr>
+      <p:sp>
+        <p:nvSpPr>
+          <p:cNvPr id="2" name="Slide Image Placeholder 1"/>
+          <p:cNvSpPr>
+            <a:spLocks noGrp="1" noRot="1" noChangeAspect="1"/>
+          </p:cNvSpPr>
+          <p:nvPr>
+            <p:ph type="sldImg"/>
+          </p:nvPr>
+        </p:nvSpPr>
+        <p:spPr/>
+      </p:sp>
+      <p:sp>
+        <p:nvSpPr>
+          <p:cNvPr id="3" name="Notes Placeholder 2"/>
+          <p:cNvSpPr>
+            <a:spLocks noGrp="1"/>
+          </p:cNvSpPr>
+          <p:nvPr>
+            <p:ph type="body" idx="1"/>
+          </p:nvPr>
+        </p:nvSpPr>
+        <p:spPr/>
+        <p:txBody>
+          <a:bodyPr/>
+          <a:lstStyle/>
+          <a:p>
+            <a:r>
+              <a:rPr lang="en-US" dirty="0"/>
+              <a:t/>
+            </a:r>
+            <a:endParaRPr lang="en-US" dirty="0"/>
+          </a:p>
+        </p:txBody>
+      </p:sp>
+      <p:sp>
+        <p:nvSpPr>
+          <p:cNvPr id="4" name="Slide Number Placeholder 3"/>
+          <p:cNvSpPr>
+            <a:spLocks noGrp="1"/>
+          </p:cNvSpPr>
+          <p:nvPr>
+            <p:ph type="sldNum" sz="quarter" idx="10"/>
+          </p:nvPr>
+        </p:nvSpPr>
+        <p:spPr/>
+        <p:txBody>
+          <a:bodyPr/>
+          <a:lstStyle/>
+          <a:p>
+            <a:fld id="{F7021451-1387-4CA6-816F-3879F97B5CBC}" type="slidenum">
+              <a:rPr lang="en-US"/>
+              <a:t>22</a:t>
             </a:fld>
             <a:endParaRPr lang="en-US"/>
           </a:p>
@@ -5753,6 +5931,322 @@
     <p:bg>
       <p:bgPr>
         <a:solidFill>
+          <a:srgbClr val="F4F5F6"/>
+        </a:solidFill>
+      </p:bgPr>
+    </p:bg>
+    <p:spTree>
+      <p:nvGrpSpPr>
+        <p:cNvPr id="1" name=""/>
+        <p:cNvGrpSpPr/>
+        <p:nvPr/>
+      </p:nvGrpSpPr>
+      <p:grpSpPr>
+        <a:xfrm>
+          <a:off x="0" y="0"/>
+          <a:ext cx="0" cy="0"/>
+          <a:chOff x="0" y="0"/>
+          <a:chExt cx="0" cy="0"/>
+        </a:xfrm>
+      </p:grpSpPr>
+      <p:sp>
+        <p:nvSpPr>
+          <p:cNvPr id="2" name="Text 0"/>
+          <p:cNvSpPr/>
+          <p:nvPr/>
+        </p:nvSpPr>
+        <p:spPr>
+          <a:xfrm>
+            <a:off x="502920" y="365760"/>
+            <a:ext cx="8138160" cy="320040"/>
+          </a:xfrm>
+          <a:prstGeom prst="rect">
+            <a:avLst/>
+          </a:prstGeom>
+          <a:noFill/>
+          <a:ln/>
+        </p:spPr>
+        <p:txBody>
+          <a:bodyPr wrap="square" rtlCol="0" anchor="ctr"/>
+          <a:lstStyle/>
+          <a:p>
+            <a:pPr indent="0" marL="0">
+              <a:buNone/>
+            </a:pPr>
+            <a:r>
+              <a:rPr lang="en-US" sz="1100" b="1" spc="150" kern="0" dirty="0">
+                <a:solidFill>
+                  <a:srgbClr val="0429BC"/>
+                </a:solidFill>
+                <a:latin typeface="Arial" pitchFamily="34" charset="0"/>
+                <a:ea typeface="Arial" pitchFamily="34" charset="-122"/>
+                <a:cs typeface="Arial" pitchFamily="34" charset="-120"/>
+              </a:rPr>
+              <a:t>VÍDEO 3.3</a:t>
+            </a:r>
+            <a:endParaRPr lang="en-US" sz="1100" dirty="0"/>
+          </a:p>
+        </p:txBody>
+      </p:sp>
+      <p:sp>
+        <p:nvSpPr>
+          <p:cNvPr id="3" name="Text 1"/>
+          <p:cNvSpPr/>
+          <p:nvPr/>
+        </p:nvSpPr>
+        <p:spPr>
+          <a:xfrm>
+            <a:off x="502920" y="713232"/>
+            <a:ext cx="8138160" cy="640080"/>
+          </a:xfrm>
+          <a:prstGeom prst="rect">
+            <a:avLst/>
+          </a:prstGeom>
+          <a:noFill/>
+          <a:ln/>
+        </p:spPr>
+        <p:txBody>
+          <a:bodyPr wrap="square" rtlCol="0" anchor="ctr"/>
+          <a:lstStyle/>
+          <a:p>
+            <a:pPr indent="0" marL="0">
+              <a:buNone/>
+            </a:pPr>
+            <a:r>
+              <a:rPr lang="en-US" sz="2600" b="1" dirty="0">
+                <a:solidFill>
+                  <a:srgbClr val="010C53"/>
+                </a:solidFill>
+                <a:latin typeface="Arial" pitchFamily="34" charset="0"/>
+                <a:ea typeface="Arial" pitchFamily="34" charset="-122"/>
+                <a:cs typeface="Arial" pitchFamily="34" charset="-120"/>
+              </a:rPr>
+              <a:t>Dado bruto tem prazo de validade</a:t>
+            </a:r>
+            <a:endParaRPr lang="en-US" sz="2600" dirty="0"/>
+          </a:p>
+        </p:txBody>
+      </p:sp>
+      <p:sp>
+        <p:nvSpPr>
+          <p:cNvPr id="4" name="Shape 2"/>
+          <p:cNvSpPr/>
+          <p:nvPr/>
+        </p:nvSpPr>
+        <p:spPr>
+          <a:xfrm>
+            <a:off x="502920" y="1371600"/>
+            <a:ext cx="8138160" cy="0"/>
+          </a:xfrm>
+          <a:prstGeom prst="line">
+            <a:avLst/>
+          </a:prstGeom>
+          <a:noFill/>
+          <a:ln w="19050">
+            <a:solidFill>
+              <a:srgbClr val="010C53"/>
+            </a:solidFill>
+            <a:prstDash val="solid"/>
+          </a:ln>
+        </p:spPr>
+      </p:sp>
+      <p:sp>
+        <p:nvSpPr>
+          <p:cNvPr id="5" name="Text 3"/>
+          <p:cNvSpPr/>
+          <p:nvPr/>
+        </p:nvSpPr>
+        <p:spPr>
+          <a:xfrm>
+            <a:off x="502920" y="1600200"/>
+            <a:ext cx="8138160" cy="3044952"/>
+          </a:xfrm>
+          <a:prstGeom prst="rect">
+            <a:avLst/>
+          </a:prstGeom>
+          <a:noFill/>
+          <a:ln/>
+        </p:spPr>
+        <p:txBody>
+          <a:bodyPr wrap="square" rtlCol="0" anchor="t"/>
+          <a:lstStyle/>
+          <a:p>
+            <a:pPr marL="342900" indent="-342900">
+              <a:lnSpc>
+                <a:spcPct val="115000"/>
+              </a:lnSpc>
+              <a:spcAft>
+                <a:spcPts val="1000"/>
+              </a:spcAft>
+              <a:buSzPct val="100000"/>
+              <a:buChar char="•"/>
+            </a:pPr>
+            <a:r>
+              <a:rPr lang="en-US" sz="1500" dirty="0">
+                <a:solidFill>
+                  <a:srgbClr val="011676"/>
+                </a:solidFill>
+                <a:latin typeface="Arial" pitchFamily="34" charset="0"/>
+                <a:ea typeface="Arial" pitchFamily="34" charset="-122"/>
+                <a:cs typeface="Arial" pitchFamily="34" charset="-120"/>
+              </a:rPr>
+              <a:t>Quando documentei esses números, eu tinha traces desde o fim de julho.</a:t>
+            </a:r>
+            <a:endParaRPr lang="en-US" sz="1500" dirty="0"/>
+          </a:p>
+          <a:p>
+            <a:pPr marL="342900" indent="-342900">
+              <a:lnSpc>
+                <a:spcPct val="115000"/>
+              </a:lnSpc>
+              <a:spcAft>
+                <a:spcPts val="1000"/>
+              </a:spcAft>
+              <a:buSzPct val="100000"/>
+              <a:buChar char="•"/>
+            </a:pPr>
+            <a:r>
+              <a:rPr lang="en-US" sz="1500" dirty="0">
+                <a:solidFill>
+                  <a:srgbClr val="011676"/>
+                </a:solidFill>
+                <a:latin typeface="Arial" pitchFamily="34" charset="0"/>
+                <a:ea typeface="Arial" pitchFamily="34" charset="-122"/>
+                <a:cs typeface="Arial" pitchFamily="34" charset="-120"/>
+              </a:rPr>
+              <a:t>A retenção do plano é de ~30 dias. Os mais antigos simplesmente evaporaram.</a:t>
+            </a:r>
+            <a:endParaRPr lang="en-US" sz="1500" dirty="0"/>
+          </a:p>
+          <a:p>
+            <a:pPr marL="342900" indent="-342900">
+              <a:lnSpc>
+                <a:spcPct val="115000"/>
+              </a:lnSpc>
+              <a:spcAft>
+                <a:spcPts val="1000"/>
+              </a:spcAft>
+              <a:buSzPct val="100000"/>
+              <a:buChar char="•"/>
+            </a:pPr>
+            <a:r>
+              <a:rPr lang="en-US" sz="1500" b="1" dirty="0">
+                <a:solidFill>
+                  <a:srgbClr val="011676"/>
+                </a:solidFill>
+                <a:latin typeface="Arial" pitchFamily="34" charset="0"/>
+                <a:ea typeface="Arial" pitchFamily="34" charset="-122"/>
+                <a:cs typeface="Arial" pitchFamily="34" charset="-120"/>
+              </a:rPr>
+              <a:t>O trace do truncamento expirou em 11/09 — dois dias depois de eu capturá-lo.</a:t>
+            </a:r>
+            <a:endParaRPr lang="en-US" sz="1500" dirty="0"/>
+          </a:p>
+          <a:p>
+            <a:pPr marL="342900" indent="-342900">
+              <a:lnSpc>
+                <a:spcPct val="115000"/>
+              </a:lnSpc>
+              <a:spcAft>
+                <a:spcPts val="1000"/>
+              </a:spcAft>
+              <a:buSzPct val="100000"/>
+              <a:buChar char="•"/>
+            </a:pPr>
+            <a:r>
+              <a:rPr lang="en-US" sz="1500" dirty="0">
+                <a:solidFill>
+                  <a:srgbClr val="011676"/>
+                </a:solidFill>
+                <a:latin typeface="Arial" pitchFamily="34" charset="0"/>
+                <a:ea typeface="Arial" pitchFamily="34" charset="-122"/>
+                <a:cs typeface="Arial" pitchFamily="34" charset="-120"/>
+              </a:rPr>
+              <a:t>Sobrevive o que você agregou, anotou ou transformou em documento.</a:t>
+            </a:r>
+            <a:endParaRPr lang="en-US" sz="1500" dirty="0"/>
+          </a:p>
+          <a:p>
+            <a:pPr marL="342900" indent="-342900">
+              <a:lnSpc>
+                <a:spcPct val="115000"/>
+              </a:lnSpc>
+              <a:spcAft>
+                <a:spcPts val="1000"/>
+              </a:spcAft>
+              <a:buSzPct val="100000"/>
+              <a:buChar char="•"/>
+            </a:pPr>
+            <a:r>
+              <a:rPr lang="en-US" sz="1500" dirty="0">
+                <a:solidFill>
+                  <a:srgbClr val="011676"/>
+                </a:solidFill>
+                <a:latin typeface="Arial" pitchFamily="34" charset="0"/>
+                <a:ea typeface="Arial" pitchFamily="34" charset="-122"/>
+                <a:cs typeface="Arial" pitchFamily="34" charset="-120"/>
+              </a:rPr>
+              <a:t>Se a sua estratégia é "está tudo guardado lá, eu vejo depois": depois pode não estar mais.</a:t>
+            </a:r>
+            <a:endParaRPr lang="en-US" sz="1500" dirty="0"/>
+          </a:p>
+        </p:txBody>
+      </p:sp>
+      <p:sp>
+        <p:nvSpPr>
+          <p:cNvPr id="6" name="Text 4"/>
+          <p:cNvSpPr/>
+          <p:nvPr/>
+        </p:nvSpPr>
+        <p:spPr>
+          <a:xfrm>
+            <a:off x="502920" y="4800600"/>
+            <a:ext cx="8138160" cy="274320"/>
+          </a:xfrm>
+          <a:prstGeom prst="rect">
+            <a:avLst/>
+          </a:prstGeom>
+          <a:noFill/>
+          <a:ln/>
+        </p:spPr>
+        <p:txBody>
+          <a:bodyPr wrap="square" rtlCol="0" anchor="ctr"/>
+          <a:lstStyle/>
+          <a:p>
+            <a:pPr indent="0" marL="0">
+              <a:buNone/>
+            </a:pPr>
+            <a:r>
+              <a:rPr lang="en-US" sz="900" dirty="0">
+                <a:solidFill>
+                  <a:srgbClr val="010C53">
+                    <a:alpha val="60000"/>
+                  </a:srgbClr>
+                </a:solidFill>
+                <a:latin typeface="Arial" pitchFamily="34" charset="0"/>
+                <a:ea typeface="Arial" pitchFamily="34" charset="-122"/>
+                <a:cs typeface="Arial" pitchFamily="34" charset="-120"/>
+              </a:rPr>
+              <a:t>Aula 3 — Observabilidade: monitorando em produção — Evals, observabilidade e conformidade</a:t>
+            </a:r>
+            <a:endParaRPr lang="en-US" sz="900" dirty="0"/>
+          </a:p>
+        </p:txBody>
+      </p:sp>
+    </p:spTree>
+  </p:cSld>
+  <p:clrMapOvr>
+    <a:masterClrMapping/>
+  </p:clrMapOvr>
+</p:sld>
+</file>
+
+<file path=ppt/slides/slide15.xml><?xml version="1.0" encoding="utf-8"?>
+<p:sld xmlns:a="http://schemas.openxmlformats.org/drawingml/2006/main" xmlns:r="http://schemas.openxmlformats.org/officeDocument/2006/relationships" xmlns:p="http://schemas.openxmlformats.org/presentationml/2006/main">
+  <p:cSld name="Slide 15">
+    <p:bg>
+      <p:bgPr>
+        <a:solidFill>
           <a:srgbClr val="0429BC"/>
         </a:solidFill>
       </p:bgPr>
@@ -5854,298 +6348,6 @@
       <p:sp>
         <p:nvSpPr>
           <p:cNvPr id="4" name="Text 2"/>
-          <p:cNvSpPr/>
-          <p:nvPr/>
-        </p:nvSpPr>
-        <p:spPr>
-          <a:xfrm>
-            <a:off x="502920" y="4800600"/>
-            <a:ext cx="8138160" cy="274320"/>
-          </a:xfrm>
-          <a:prstGeom prst="rect">
-            <a:avLst/>
-          </a:prstGeom>
-          <a:noFill/>
-          <a:ln/>
-        </p:spPr>
-        <p:txBody>
-          <a:bodyPr wrap="square" rtlCol="0" anchor="ctr"/>
-          <a:lstStyle/>
-          <a:p>
-            <a:pPr indent="0" marL="0">
-              <a:buNone/>
-            </a:pPr>
-            <a:r>
-              <a:rPr lang="en-US" sz="900" dirty="0">
-                <a:solidFill>
-                  <a:srgbClr val="010C53">
-                    <a:alpha val="60000"/>
-                  </a:srgbClr>
-                </a:solidFill>
-                <a:latin typeface="Arial" pitchFamily="34" charset="0"/>
-                <a:ea typeface="Arial" pitchFamily="34" charset="-122"/>
-                <a:cs typeface="Arial" pitchFamily="34" charset="-120"/>
-              </a:rPr>
-              <a:t>Aula 3 — Observabilidade: monitorando em produção — Evals, observabilidade e conformidade</a:t>
-            </a:r>
-            <a:endParaRPr lang="en-US" sz="900" dirty="0"/>
-          </a:p>
-        </p:txBody>
-      </p:sp>
-    </p:spTree>
-  </p:cSld>
-  <p:clrMapOvr>
-    <a:masterClrMapping/>
-  </p:clrMapOvr>
-</p:sld>
-</file>
-
-<file path=ppt/slides/slide15.xml><?xml version="1.0" encoding="utf-8"?>
-<p:sld xmlns:a="http://schemas.openxmlformats.org/drawingml/2006/main" xmlns:r="http://schemas.openxmlformats.org/officeDocument/2006/relationships" xmlns:p="http://schemas.openxmlformats.org/presentationml/2006/main">
-  <p:cSld name="Slide 15">
-    <p:bg>
-      <p:bgPr>
-        <a:solidFill>
-          <a:srgbClr val="F4F5F6"/>
-        </a:solidFill>
-      </p:bgPr>
-    </p:bg>
-    <p:spTree>
-      <p:nvGrpSpPr>
-        <p:cNvPr id="1" name=""/>
-        <p:cNvGrpSpPr/>
-        <p:nvPr/>
-      </p:nvGrpSpPr>
-      <p:grpSpPr>
-        <a:xfrm>
-          <a:off x="0" y="0"/>
-          <a:ext cx="0" cy="0"/>
-          <a:chOff x="0" y="0"/>
-          <a:chExt cx="0" cy="0"/>
-        </a:xfrm>
-      </p:grpSpPr>
-      <p:sp>
-        <p:nvSpPr>
-          <p:cNvPr id="2" name="Text 0"/>
-          <p:cNvSpPr/>
-          <p:nvPr/>
-        </p:nvSpPr>
-        <p:spPr>
-          <a:xfrm>
-            <a:off x="502920" y="365760"/>
-            <a:ext cx="8138160" cy="320040"/>
-          </a:xfrm>
-          <a:prstGeom prst="rect">
-            <a:avLst/>
-          </a:prstGeom>
-          <a:noFill/>
-          <a:ln/>
-        </p:spPr>
-        <p:txBody>
-          <a:bodyPr wrap="square" rtlCol="0" anchor="ctr"/>
-          <a:lstStyle/>
-          <a:p>
-            <a:pPr indent="0" marL="0">
-              <a:buNone/>
-            </a:pPr>
-            <a:r>
-              <a:rPr lang="en-US" sz="1100" b="1" spc="150" kern="0" dirty="0">
-                <a:solidFill>
-                  <a:srgbClr val="0429BC"/>
-                </a:solidFill>
-                <a:latin typeface="Arial" pitchFamily="34" charset="0"/>
-                <a:ea typeface="Arial" pitchFamily="34" charset="-122"/>
-                <a:cs typeface="Arial" pitchFamily="34" charset="-120"/>
-              </a:rPr>
-              <a:t>VÍDEO 3.4</a:t>
-            </a:r>
-            <a:endParaRPr lang="en-US" sz="1100" dirty="0"/>
-          </a:p>
-        </p:txBody>
-      </p:sp>
-      <p:sp>
-        <p:nvSpPr>
-          <p:cNvPr id="3" name="Text 1"/>
-          <p:cNvSpPr/>
-          <p:nvPr/>
-        </p:nvSpPr>
-        <p:spPr>
-          <a:xfrm>
-            <a:off x="502920" y="713232"/>
-            <a:ext cx="8138160" cy="640080"/>
-          </a:xfrm>
-          <a:prstGeom prst="rect">
-            <a:avLst/>
-          </a:prstGeom>
-          <a:noFill/>
-          <a:ln/>
-        </p:spPr>
-        <p:txBody>
-          <a:bodyPr wrap="square" rtlCol="0" anchor="ctr"/>
-          <a:lstStyle/>
-          <a:p>
-            <a:pPr indent="0" marL="0">
-              <a:buNone/>
-            </a:pPr>
-            <a:r>
-              <a:rPr lang="en-US" sz="2600" b="1" dirty="0">
-                <a:solidFill>
-                  <a:srgbClr val="010C53"/>
-                </a:solidFill>
-                <a:latin typeface="Arial" pitchFamily="34" charset="0"/>
-                <a:ea typeface="Arial" pitchFamily="34" charset="-122"/>
-                <a:cs typeface="Arial" pitchFamily="34" charset="-120"/>
-              </a:rPr>
-              <a:t>4 padrões de falha reais</a:t>
-            </a:r>
-            <a:endParaRPr lang="en-US" sz="2600" dirty="0"/>
-          </a:p>
-        </p:txBody>
-      </p:sp>
-      <p:sp>
-        <p:nvSpPr>
-          <p:cNvPr id="4" name="Shape 2"/>
-          <p:cNvSpPr/>
-          <p:nvPr/>
-        </p:nvSpPr>
-        <p:spPr>
-          <a:xfrm>
-            <a:off x="502920" y="1371600"/>
-            <a:ext cx="8138160" cy="0"/>
-          </a:xfrm>
-          <a:prstGeom prst="line">
-            <a:avLst/>
-          </a:prstGeom>
-          <a:noFill/>
-          <a:ln w="19050">
-            <a:solidFill>
-              <a:srgbClr val="010C53"/>
-            </a:solidFill>
-            <a:prstDash val="solid"/>
-          </a:ln>
-        </p:spPr>
-      </p:sp>
-      <p:sp>
-        <p:nvSpPr>
-          <p:cNvPr id="5" name="Text 3"/>
-          <p:cNvSpPr/>
-          <p:nvPr/>
-        </p:nvSpPr>
-        <p:spPr>
-          <a:xfrm>
-            <a:off x="502920" y="1600200"/>
-            <a:ext cx="8138160" cy="3044952"/>
-          </a:xfrm>
-          <a:prstGeom prst="rect">
-            <a:avLst/>
-          </a:prstGeom>
-          <a:noFill/>
-          <a:ln/>
-        </p:spPr>
-        <p:txBody>
-          <a:bodyPr wrap="square" rtlCol="0" anchor="t"/>
-          <a:lstStyle/>
-          <a:p>
-            <a:pPr marL="342900" indent="-342900">
-              <a:lnSpc>
-                <a:spcPct val="115000"/>
-              </a:lnSpc>
-              <a:spcAft>
-                <a:spcPts val="1000"/>
-              </a:spcAft>
-              <a:buSzPct val="100000"/>
-              <a:buChar char="•"/>
-            </a:pPr>
-            <a:r>
-              <a:rPr lang="en-US" sz="1500" dirty="0">
-                <a:solidFill>
-                  <a:srgbClr val="011676"/>
-                </a:solidFill>
-                <a:latin typeface="Arial" pitchFamily="34" charset="0"/>
-                <a:ea typeface="Arial" pitchFamily="34" charset="-122"/>
-                <a:cs typeface="Arial" pitchFamily="34" charset="-120"/>
-              </a:rPr>
-              <a:t>Truncamento por max_tokens (SDD §11.4).</a:t>
-            </a:r>
-            <a:endParaRPr lang="en-US" sz="1500" dirty="0"/>
-          </a:p>
-          <a:p>
-            <a:pPr marL="342900" indent="-342900">
-              <a:lnSpc>
-                <a:spcPct val="115000"/>
-              </a:lnSpc>
-              <a:spcAft>
-                <a:spcPts val="1000"/>
-              </a:spcAft>
-              <a:buSzPct val="100000"/>
-              <a:buChar char="•"/>
-            </a:pPr>
-            <a:r>
-              <a:rPr lang="en-US" sz="1500" dirty="0">
-                <a:solidFill>
-                  <a:srgbClr val="011676"/>
-                </a:solidFill>
-                <a:latin typeface="Arial" pitchFamily="34" charset="0"/>
-                <a:ea typeface="Arial" pitchFamily="34" charset="-122"/>
-                <a:cs typeface="Arial" pitchFamily="34" charset="-120"/>
-              </a:rPr>
-              <a:t>Erro engolido por fallback defensivo — || [] escondendo falha de query (SDD §11.6).</a:t>
-            </a:r>
-            <a:endParaRPr lang="en-US" sz="1500" dirty="0"/>
-          </a:p>
-          <a:p>
-            <a:pPr marL="342900" indent="-342900">
-              <a:lnSpc>
-                <a:spcPct val="115000"/>
-              </a:lnSpc>
-              <a:spcAft>
-                <a:spcPts val="1000"/>
-              </a:spcAft>
-              <a:buSzPct val="100000"/>
-              <a:buChar char="•"/>
-            </a:pPr>
-            <a:r>
-              <a:rPr lang="en-US" sz="1500" dirty="0">
-                <a:solidFill>
-                  <a:srgbClr val="011676"/>
-                </a:solidFill>
-                <a:latin typeface="Arial" pitchFamily="34" charset="0"/>
-                <a:ea typeface="Arial" pitchFamily="34" charset="-122"/>
-                <a:cs typeface="Arial" pitchFamily="34" charset="-120"/>
-              </a:rPr>
-              <a:t>Episódios A e B do Telegram — dois modos de cegueira no canal.</a:t>
-            </a:r>
-            <a:endParaRPr lang="en-US" sz="1500" dirty="0"/>
-          </a:p>
-          <a:p>
-            <a:pPr marL="342900" indent="-342900">
-              <a:lnSpc>
-                <a:spcPct val="115000"/>
-              </a:lnSpc>
-              <a:spcAft>
-                <a:spcPts val="1000"/>
-              </a:spcAft>
-              <a:buSzPct val="100000"/>
-              <a:buChar char="•"/>
-            </a:pPr>
-            <a:r>
-              <a:rPr lang="en-US" sz="1500" dirty="0">
-                <a:solidFill>
-                  <a:srgbClr val="011676"/>
-                </a:solidFill>
-                <a:latin typeface="Arial" pitchFamily="34" charset="0"/>
-                <a:ea typeface="Arial" pitchFamily="34" charset="-122"/>
-                <a:cs typeface="Arial" pitchFamily="34" charset="-120"/>
-              </a:rPr>
-              <a:t>Episódio C — o modelo acertou, o código errou (falha de estado).</a:t>
-            </a:r>
-            <a:endParaRPr lang="en-US" sz="1500" dirty="0"/>
-          </a:p>
-        </p:txBody>
-      </p:sp>
-      <p:sp>
-        <p:nvSpPr>
-          <p:cNvPr id="6" name="Text 4"/>
           <p:cNvSpPr/>
           <p:nvPr/>
         </p:nvSpPr>
@@ -6288,7 +6490,7 @@
                 <a:ea typeface="Arial" pitchFamily="34" charset="-122"/>
                 <a:cs typeface="Arial" pitchFamily="34" charset="-120"/>
               </a:rPr>
-              <a:t>Truncamento por max_tokens</a:t>
+              <a:t>4 padrões de falha reais</a:t>
             </a:r>
             <a:endParaRPr lang="en-US" sz="2600" dirty="0"/>
           </a:p>
@@ -6357,7 +6559,7 @@
                 <a:ea typeface="Arial" pitchFamily="34" charset="-122"/>
                 <a:cs typeface="Arial" pitchFamily="34" charset="-120"/>
               </a:rPr>
-              <a:t>Assinatura reconhecível: output tokens == max_tokens configurado (1024).</a:t>
+              <a:t>Truncamento por max_tokens (SDD §11.4).</a:t>
             </a:r>
             <a:endParaRPr lang="en-US" sz="1500" dirty="0"/>
           </a:p>
@@ -6381,7 +6583,7 @@
                 <a:ea typeface="Arial" pitchFamily="34" charset="-122"/>
                 <a:cs typeface="Arial" pitchFamily="34" charset="-120"/>
               </a:rPr>
-              <a:t>Resposta cortada no meio de uma palavra, na primeira observação.</a:t>
+              <a:t>Erro engolido por fallback defensivo — || [] escondendo falha de query (SDD §11.6).</a:t>
             </a:r>
             <a:endParaRPr lang="en-US" sz="1500" dirty="0"/>
           </a:p>
@@ -6397,7 +6599,7 @@
               <a:buChar char="•"/>
             </a:pPr>
             <a:r>
-              <a:rPr lang="en-US" sz="1500" b="1" dirty="0">
+              <a:rPr lang="en-US" sz="1500" dirty="0">
                 <a:solidFill>
                   <a:srgbClr val="011676"/>
                 </a:solidFill>
@@ -6405,7 +6607,7 @@
                 <a:ea typeface="Arial" pitchFamily="34" charset="-122"/>
                 <a:cs typeface="Arial" pitchFamily="34" charset="-120"/>
               </a:rPr>
-              <a:t>Desde 12/08, com despensa maior: o corte pode acontecer no meio de uma tool call, deixando um tool_use órfão.</a:t>
+              <a:t>Episódios A e B do Telegram — dois modos de cegueira no canal.</a:t>
             </a:r>
             <a:endParaRPr lang="en-US" sz="1500" dirty="0"/>
           </a:p>
@@ -6429,7 +6631,7 @@
                 <a:ea typeface="Arial" pitchFamily="34" charset="-122"/>
                 <a:cs typeface="Arial" pitchFamily="34" charset="-120"/>
               </a:rPr>
-              <a:t>Isso derruba a chamada seguinte com erro 400 da Anthropic. Não corrigido de propósito — reprodução ao vivo na Aula 4.</a:t>
+              <a:t>Episódio C — o modelo acertou, o código errou (falha de estado).</a:t>
             </a:r>
             <a:endParaRPr lang="en-US" sz="1500" dirty="0"/>
           </a:p>
@@ -6580,7 +6782,7 @@
                 <a:ea typeface="Arial" pitchFamily="34" charset="-122"/>
                 <a:cs typeface="Arial" pitchFamily="34" charset="-120"/>
               </a:rPr>
-              <a:t>O padrão comum</a:t>
+              <a:t>Truncamento por max_tokens</a:t>
             </a:r>
             <a:endParaRPr lang="en-US" sz="2600" dirty="0"/>
           </a:p>
@@ -6641,7 +6843,7 @@
               <a:buChar char="•"/>
             </a:pPr>
             <a:r>
-              <a:rPr lang="en-US" sz="1500" b="1" dirty="0">
+              <a:rPr lang="en-US" sz="1500" dirty="0">
                 <a:solidFill>
                   <a:srgbClr val="011676"/>
                 </a:solidFill>
@@ -6649,7 +6851,7 @@
                 <a:ea typeface="Arial" pitchFamily="34" charset="-122"/>
                 <a:cs typeface="Arial" pitchFamily="34" charset="-120"/>
               </a:rPr>
-              <a:t>Nenhum dos quatro gritou sozinho.</a:t>
+              <a:t>Assinatura reconhecível: output tokens == max_tokens configurado (1024).</a:t>
             </a:r>
             <a:endParaRPr lang="en-US" sz="1500" dirty="0"/>
           </a:p>
@@ -6673,58 +6875,23 @@
                 <a:ea typeface="Arial" pitchFamily="34" charset="-122"/>
                 <a:cs typeface="Arial" pitchFamily="34" charset="-120"/>
               </a:rPr>
-              <a:t>Cada um precisou de alguém olhando o dado certo, na hora certa, com a pergunta certa.</a:t>
+              <a:t>Resposta cortada no meio de uma palavra, na primeira observação.</a:t>
             </a:r>
             <a:endParaRPr lang="en-US" sz="1500" dirty="0"/>
           </a:p>
-        </p:txBody>
-      </p:sp>
-      <p:sp>
-        <p:nvSpPr>
-          <p:cNvPr id="6" name="Shape 4"/>
-          <p:cNvSpPr/>
-          <p:nvPr/>
-        </p:nvSpPr>
-        <p:spPr>
-          <a:xfrm>
-            <a:off x="502920" y="4096512"/>
-            <a:ext cx="54864" cy="640080"/>
-          </a:xfrm>
-          <a:prstGeom prst="rect">
-            <a:avLst/>
-          </a:prstGeom>
-          <a:solidFill>
-            <a:srgbClr val="0429BC"/>
-          </a:solidFill>
-          <a:ln/>
-        </p:spPr>
-      </p:sp>
-      <p:sp>
-        <p:nvSpPr>
-          <p:cNvPr id="7" name="Text 5"/>
-          <p:cNvSpPr/>
-          <p:nvPr/>
-        </p:nvSpPr>
-        <p:spPr>
-          <a:xfrm>
-            <a:off x="685800" y="4096512"/>
-            <a:ext cx="7955280" cy="640080"/>
-          </a:xfrm>
-          <a:prstGeom prst="rect">
-            <a:avLst/>
-          </a:prstGeom>
-          <a:noFill/>
-          <a:ln/>
-        </p:spPr>
-        <p:txBody>
-          <a:bodyPr wrap="square" rtlCol="0" anchor="ctr"/>
-          <a:lstStyle/>
-          <a:p>
-            <a:pPr indent="0" marL="0">
-              <a:buNone/>
-            </a:pPr>
-            <a:r>
-              <a:rPr lang="en-US" sz="1300" i="1" dirty="0">
+          <a:p>
+            <a:pPr marL="342900" indent="-342900">
+              <a:lnSpc>
+                <a:spcPct val="115000"/>
+              </a:lnSpc>
+              <a:spcAft>
+                <a:spcPts val="1000"/>
+              </a:spcAft>
+              <a:buSzPct val="100000"/>
+              <a:buChar char="•"/>
+            </a:pPr>
+            <a:r>
+              <a:rPr lang="en-US" sz="1500" b="1" dirty="0">
                 <a:solidFill>
                   <a:srgbClr val="011676"/>
                 </a:solidFill>
@@ -6732,15 +6899,39 @@
                 <a:ea typeface="Arial" pitchFamily="34" charset="-122"/>
                 <a:cs typeface="Arial" pitchFamily="34" charset="-120"/>
               </a:rPr>
-              <a:t>Detectar, diagnosticar e corrigir — é exatamente pra isso que serve a Aula 4.</a:t>
-            </a:r>
-            <a:endParaRPr lang="en-US" sz="1300" dirty="0"/>
-          </a:p>
-        </p:txBody>
-      </p:sp>
-      <p:sp>
-        <p:nvSpPr>
-          <p:cNvPr id="8" name="Text 6"/>
+              <a:t>Desde 12/08, com despensa maior: o corte pode acontecer no meio de uma tool call, deixando um tool_use órfão.</a:t>
+            </a:r>
+            <a:endParaRPr lang="en-US" sz="1500" dirty="0"/>
+          </a:p>
+          <a:p>
+            <a:pPr marL="342900" indent="-342900">
+              <a:lnSpc>
+                <a:spcPct val="115000"/>
+              </a:lnSpc>
+              <a:spcAft>
+                <a:spcPts val="1000"/>
+              </a:spcAft>
+              <a:buSzPct val="100000"/>
+              <a:buChar char="•"/>
+            </a:pPr>
+            <a:r>
+              <a:rPr lang="en-US" sz="1500" dirty="0">
+                <a:solidFill>
+                  <a:srgbClr val="011676"/>
+                </a:solidFill>
+                <a:latin typeface="Arial" pitchFamily="34" charset="0"/>
+                <a:ea typeface="Arial" pitchFamily="34" charset="-122"/>
+                <a:cs typeface="Arial" pitchFamily="34" charset="-120"/>
+              </a:rPr>
+              <a:t>Isso derruba a chamada seguinte com erro 400 da Anthropic. Não corrigido de propósito — reprodução ao vivo na Aula 4.</a:t>
+            </a:r>
+            <a:endParaRPr lang="en-US" sz="1500" dirty="0"/>
+          </a:p>
+        </p:txBody>
+      </p:sp>
+      <p:sp>
+        <p:nvSpPr>
+          <p:cNvPr id="6" name="Text 4"/>
           <p:cNvSpPr/>
           <p:nvPr/>
         </p:nvSpPr>
@@ -6793,7 +6984,7 @@
     <p:bg>
       <p:bgPr>
         <a:solidFill>
-          <a:srgbClr val="0429BC"/>
+          <a:srgbClr val="F4F5F6"/>
         </a:solidFill>
       </p:bgPr>
     </p:bg>
@@ -6819,8 +7010,8 @@
         </p:nvSpPr>
         <p:spPr>
           <a:xfrm>
-            <a:off x="502920" y="1554480"/>
-            <a:ext cx="1828800" cy="914400"/>
+            <a:off x="502920" y="365760"/>
+            <a:ext cx="8138160" cy="320040"/>
           </a:xfrm>
           <a:prstGeom prst="rect">
             <a:avLst/>
@@ -6836,19 +7027,17 @@
               <a:buNone/>
             </a:pPr>
             <a:r>
-              <a:rPr lang="en-US" sz="2000" b="1" dirty="0">
-                <a:solidFill>
-                  <a:srgbClr val="F4F5F6">
-                    <a:alpha val="80000"/>
-                  </a:srgbClr>
-                </a:solidFill>
-                <a:latin typeface="Consolas" pitchFamily="34" charset="0"/>
-                <a:ea typeface="Consolas" pitchFamily="34" charset="-122"/>
-                <a:cs typeface="Consolas" pitchFamily="34" charset="-120"/>
-              </a:rPr>
-              <a:t>3.5</a:t>
-            </a:r>
-            <a:endParaRPr lang="en-US" sz="2000" dirty="0"/>
+              <a:rPr lang="en-US" sz="1100" b="1" spc="150" kern="0" dirty="0">
+                <a:solidFill>
+                  <a:srgbClr val="0429BC"/>
+                </a:solidFill>
+                <a:latin typeface="Arial" pitchFamily="34" charset="0"/>
+                <a:ea typeface="Arial" pitchFamily="34" charset="-122"/>
+                <a:cs typeface="Arial" pitchFamily="34" charset="-120"/>
+              </a:rPr>
+              <a:t>VÍDEO 3.4</a:t>
+            </a:r>
+            <a:endParaRPr lang="en-US" sz="1100" dirty="0"/>
           </a:p>
         </p:txBody>
       </p:sp>
@@ -6860,8 +7049,8 @@
         </p:nvSpPr>
         <p:spPr>
           <a:xfrm>
-            <a:off x="502920" y="1965960"/>
-            <a:ext cx="8138160" cy="1280160"/>
+            <a:off x="502920" y="713232"/>
+            <a:ext cx="8138160" cy="640080"/>
           </a:xfrm>
           <a:prstGeom prst="rect">
             <a:avLst/>
@@ -6877,23 +7066,188 @@
               <a:buNone/>
             </a:pPr>
             <a:r>
-              <a:rPr lang="en-US" sz="3400" b="1" dirty="0">
-                <a:solidFill>
-                  <a:srgbClr val="F4F5F6"/>
-                </a:solidFill>
-                <a:latin typeface="Arial" pitchFamily="34" charset="0"/>
-                <a:ea typeface="Arial" pitchFamily="34" charset="-122"/>
-                <a:cs typeface="Arial" pitchFamily="34" charset="-120"/>
-              </a:rPr>
-              <a:t>O que aprendemos?</a:t>
-            </a:r>
-            <a:endParaRPr lang="en-US" sz="3400" dirty="0"/>
-          </a:p>
-        </p:txBody>
-      </p:sp>
-      <p:sp>
-        <p:nvSpPr>
-          <p:cNvPr id="4" name="Text 2"/>
+              <a:rPr lang="en-US" sz="2600" b="1" dirty="0">
+                <a:solidFill>
+                  <a:srgbClr val="010C53"/>
+                </a:solidFill>
+                <a:latin typeface="Arial" pitchFamily="34" charset="0"/>
+                <a:ea typeface="Arial" pitchFamily="34" charset="-122"/>
+                <a:cs typeface="Arial" pitchFamily="34" charset="-120"/>
+              </a:rPr>
+              <a:t>O mesmo modelo, outro comportamento</a:t>
+            </a:r>
+            <a:endParaRPr lang="en-US" sz="2600" dirty="0"/>
+          </a:p>
+        </p:txBody>
+      </p:sp>
+      <p:sp>
+        <p:nvSpPr>
+          <p:cNvPr id="4" name="Shape 2"/>
+          <p:cNvSpPr/>
+          <p:nvPr/>
+        </p:nvSpPr>
+        <p:spPr>
+          <a:xfrm>
+            <a:off x="502920" y="1371600"/>
+            <a:ext cx="8138160" cy="0"/>
+          </a:xfrm>
+          <a:prstGeom prst="line">
+            <a:avLst/>
+          </a:prstGeom>
+          <a:noFill/>
+          <a:ln w="19050">
+            <a:solidFill>
+              <a:srgbClr val="010C53"/>
+            </a:solidFill>
+            <a:prstDash val="solid"/>
+          </a:ln>
+        </p:spPr>
+      </p:sp>
+      <p:sp>
+        <p:nvSpPr>
+          <p:cNvPr id="5" name="Text 3"/>
+          <p:cNvSpPr/>
+          <p:nvPr/>
+        </p:nvSpPr>
+        <p:spPr>
+          <a:xfrm>
+            <a:off x="502920" y="1600200"/>
+            <a:ext cx="8138160" cy="3044952"/>
+          </a:xfrm>
+          <a:prstGeom prst="rect">
+            <a:avLst/>
+          </a:prstGeom>
+          <a:noFill/>
+          <a:ln/>
+        </p:spPr>
+        <p:txBody>
+          <a:bodyPr wrap="square" rtlCol="0" anchor="t"/>
+          <a:lstStyle/>
+          <a:p>
+            <a:pPr marL="342900" indent="-342900">
+              <a:lnSpc>
+                <a:spcPct val="115000"/>
+              </a:lnSpc>
+              <a:spcAft>
+                <a:spcPts val="1000"/>
+              </a:spcAft>
+              <a:buSzPct val="100000"/>
+              <a:buChar char="•"/>
+            </a:pPr>
+            <a:r>
+              <a:rPr lang="en-US" sz="1500" dirty="0">
+                <a:solidFill>
+                  <a:srgbClr val="011676"/>
+                </a:solidFill>
+                <a:latin typeface="Arial" pitchFamily="34" charset="0"/>
+                <a:ea typeface="Arial" pitchFamily="34" charset="-122"/>
+                <a:cs typeface="Arial" pitchFamily="34" charset="-120"/>
+              </a:rPr>
+              <a:t>22/08 — entrada "lasagna": o modelo extraiu "lasagna" cru, e o match falhou.</a:t>
+            </a:r>
+            <a:endParaRPr lang="en-US" sz="1500" dirty="0"/>
+          </a:p>
+          <a:p>
+            <a:pPr marL="342900" indent="-342900">
+              <a:lnSpc>
+                <a:spcPct val="115000"/>
+              </a:lnSpc>
+              <a:spcAft>
+                <a:spcPts val="1000"/>
+              </a:spcAft>
+              <a:buSzPct val="100000"/>
+              <a:buChar char="•"/>
+            </a:pPr>
+            <a:r>
+              <a:rPr lang="en-US" sz="1500" dirty="0">
+                <a:solidFill>
+                  <a:srgbClr val="011676"/>
+                </a:solidFill>
+                <a:latin typeface="Arial" pitchFamily="34" charset="0"/>
+                <a:ea typeface="Arial" pitchFamily="34" charset="-122"/>
+                <a:cs typeface="Arial" pitchFamily="34" charset="-120"/>
+              </a:rPr>
+              <a:t>29/08 — entrada "lasagna" de novo: o modelo normalizou para "lasanha" sozinho.</a:t>
+            </a:r>
+            <a:endParaRPr lang="en-US" sz="1500" dirty="0"/>
+          </a:p>
+          <a:p>
+            <a:pPr marL="342900" indent="-342900">
+              <a:lnSpc>
+                <a:spcPct val="115000"/>
+              </a:lnSpc>
+              <a:spcAft>
+                <a:spcPts val="1000"/>
+              </a:spcAft>
+              <a:buSzPct val="100000"/>
+              <a:buChar char="•"/>
+            </a:pPr>
+            <a:r>
+              <a:rPr lang="en-US" sz="1500" b="1" dirty="0">
+                <a:solidFill>
+                  <a:srgbClr val="011676"/>
+                </a:solidFill>
+                <a:latin typeface="Arial" pitchFamily="34" charset="0"/>
+                <a:ea typeface="Arial" pitchFamily="34" charset="-122"/>
+                <a:cs typeface="Arial" pitchFamily="34" charset="-120"/>
+              </a:rPr>
+              <a:t>Mesmo prompt, mesmo modelo, sete dias de diferença.</a:t>
+            </a:r>
+            <a:endParaRPr lang="en-US" sz="1500" dirty="0"/>
+          </a:p>
+          <a:p>
+            <a:pPr marL="342900" indent="-342900">
+              <a:lnSpc>
+                <a:spcPct val="115000"/>
+              </a:lnSpc>
+              <a:spcAft>
+                <a:spcPts val="1000"/>
+              </a:spcAft>
+              <a:buSzPct val="100000"/>
+              <a:buChar char="•"/>
+            </a:pPr>
+            <a:r>
+              <a:rPr lang="en-US" sz="1500" dirty="0">
+                <a:solidFill>
+                  <a:srgbClr val="011676"/>
+                </a:solidFill>
+                <a:latin typeface="Arial" pitchFamily="34" charset="0"/>
+                <a:ea typeface="Arial" pitchFamily="34" charset="-122"/>
+                <a:cs typeface="Arial" pitchFamily="34" charset="-120"/>
+              </a:rPr>
+              <a:t>Nenhuma linha de código mudou entre os dois — e o comportamento mudou.</a:t>
+            </a:r>
+            <a:endParaRPr lang="en-US" sz="1500" dirty="0"/>
+          </a:p>
+          <a:p>
+            <a:pPr marL="342900" indent="-342900">
+              <a:lnSpc>
+                <a:spcPct val="115000"/>
+              </a:lnSpc>
+              <a:spcAft>
+                <a:spcPts val="1000"/>
+              </a:spcAft>
+              <a:buSzPct val="100000"/>
+              <a:buChar char="•"/>
+            </a:pPr>
+            <a:r>
+              <a:rPr lang="en-US" sz="1500" dirty="0">
+                <a:solidFill>
+                  <a:srgbClr val="011676"/>
+                </a:solidFill>
+                <a:latin typeface="Arial" pitchFamily="34" charset="0"/>
+                <a:ea typeface="Arial" pitchFamily="34" charset="-122"/>
+                <a:cs typeface="Arial" pitchFamily="34" charset="-120"/>
+              </a:rPr>
+              <a:t>É a tese da Aula 1, agora com trace dos dois lados.</a:t>
+            </a:r>
+            <a:endParaRPr lang="en-US" sz="1500" dirty="0"/>
+          </a:p>
+        </p:txBody>
+      </p:sp>
+      <p:sp>
+        <p:nvSpPr>
+          <p:cNvPr id="6" name="Text 4"/>
           <p:cNvSpPr/>
           <p:nvPr/>
         </p:nvSpPr>
@@ -6997,7 +7351,7 @@
                 <a:ea typeface="Arial" pitchFamily="34" charset="-122"/>
                 <a:cs typeface="Arial" pitchFamily="34" charset="-120"/>
               </a:rPr>
-              <a:t>FECHAMENTO DA AULA</a:t>
+              <a:t>VÍDEO 3.4</a:t>
             </a:r>
             <a:endParaRPr lang="en-US" sz="1100" dirty="0"/>
           </a:p>
@@ -7036,7 +7390,7 @@
                 <a:ea typeface="Arial" pitchFamily="34" charset="-122"/>
                 <a:cs typeface="Arial" pitchFamily="34" charset="-120"/>
               </a:rPr>
-              <a:t>O que aprendemos</a:t>
+              <a:t>O padrão comum</a:t>
             </a:r>
             <a:endParaRPr lang="en-US" sz="2600" dirty="0"/>
           </a:p>
@@ -7097,7 +7451,7 @@
               <a:buChar char="•"/>
             </a:pPr>
             <a:r>
-              <a:rPr lang="en-US" sz="1500" dirty="0">
+              <a:rPr lang="en-US" sz="1500" b="1" dirty="0">
                 <a:solidFill>
                   <a:srgbClr val="011676"/>
                 </a:solidFill>
@@ -7105,7 +7459,7 @@
                 <a:ea typeface="Arial" pitchFamily="34" charset="-122"/>
                 <a:cs typeface="Arial" pitchFamily="34" charset="-120"/>
               </a:rPr>
-              <a:t>Observabilidade é reconstruir a causa, não só registrar o evento — no Chef Caseiro é invariante de código.</a:t>
+              <a:t>Nenhum dos quatro gritou sozinho.</a:t>
             </a:r>
             <a:endParaRPr lang="en-US" sz="1500" dirty="0"/>
           </a:p>
@@ -7129,23 +7483,58 @@
                 <a:ea typeface="Arial" pitchFamily="34" charset="-122"/>
                 <a:cs typeface="Arial" pitchFamily="34" charset="-120"/>
               </a:rPr>
-              <a:t>Trace → observation → generation é a estrutura de dados do Langfuse.</a:t>
+              <a:t>Cada um precisou de alguém olhando o dado certo, na hora certa, com a pergunta certa.</a:t>
             </a:r>
             <a:endParaRPr lang="en-US" sz="1500" dirty="0"/>
           </a:p>
-          <a:p>
-            <a:pPr marL="342900" indent="-342900">
-              <a:lnSpc>
-                <a:spcPct val="115000"/>
-              </a:lnSpc>
-              <a:spcAft>
-                <a:spcPts val="1000"/>
-              </a:spcAft>
-              <a:buSzPct val="100000"/>
-              <a:buChar char="•"/>
-            </a:pPr>
-            <a:r>
-              <a:rPr lang="en-US" sz="1500" b="1" dirty="0">
+        </p:txBody>
+      </p:sp>
+      <p:sp>
+        <p:nvSpPr>
+          <p:cNvPr id="6" name="Shape 4"/>
+          <p:cNvSpPr/>
+          <p:nvPr/>
+        </p:nvSpPr>
+        <p:spPr>
+          <a:xfrm>
+            <a:off x="502920" y="4096512"/>
+            <a:ext cx="54864" cy="640080"/>
+          </a:xfrm>
+          <a:prstGeom prst="rect">
+            <a:avLst/>
+          </a:prstGeom>
+          <a:solidFill>
+            <a:srgbClr val="0429BC"/>
+          </a:solidFill>
+          <a:ln/>
+        </p:spPr>
+      </p:sp>
+      <p:sp>
+        <p:nvSpPr>
+          <p:cNvPr id="7" name="Text 5"/>
+          <p:cNvSpPr/>
+          <p:nvPr/>
+        </p:nvSpPr>
+        <p:spPr>
+          <a:xfrm>
+            <a:off x="685800" y="4096512"/>
+            <a:ext cx="7955280" cy="640080"/>
+          </a:xfrm>
+          <a:prstGeom prst="rect">
+            <a:avLst/>
+          </a:prstGeom>
+          <a:noFill/>
+          <a:ln/>
+        </p:spPr>
+        <p:txBody>
+          <a:bodyPr wrap="square" rtlCol="0" anchor="ctr"/>
+          <a:lstStyle/>
+          <a:p>
+            <a:pPr indent="0" marL="0">
+              <a:buNone/>
+            </a:pPr>
+            <a:r>
+              <a:rPr lang="en-US" sz="1300" i="1" dirty="0">
                 <a:solidFill>
                   <a:srgbClr val="011676"/>
                 </a:solidFill>
@@ -7153,39 +7542,15 @@
                 <a:ea typeface="Arial" pitchFamily="34" charset="-122"/>
                 <a:cs typeface="Arial" pitchFamily="34" charset="-120"/>
               </a:rPr>
-              <a:t>Dado real (68 traces, US$ 1,65) mostra onde o custo se concentra e onde trocar de modelo compensa.</a:t>
-            </a:r>
-            <a:endParaRPr lang="en-US" sz="1500" dirty="0"/>
-          </a:p>
-          <a:p>
-            <a:pPr marL="342900" indent="-342900">
-              <a:lnSpc>
-                <a:spcPct val="115000"/>
-              </a:lnSpc>
-              <a:spcAft>
-                <a:spcPts val="1000"/>
-              </a:spcAft>
-              <a:buSzPct val="100000"/>
-              <a:buChar char="•"/>
-            </a:pPr>
-            <a:r>
-              <a:rPr lang="en-US" sz="1500" dirty="0">
-                <a:solidFill>
-                  <a:srgbClr val="011676"/>
-                </a:solidFill>
-                <a:latin typeface="Arial" pitchFamily="34" charset="0"/>
-                <a:ea typeface="Arial" pitchFamily="34" charset="-122"/>
-                <a:cs typeface="Arial" pitchFamily="34" charset="-120"/>
-              </a:rPr>
-              <a:t>Quatro padrões de falha documentados — nenhum gritou sozinho.</a:t>
-            </a:r>
-            <a:endParaRPr lang="en-US" sz="1500" dirty="0"/>
-          </a:p>
-        </p:txBody>
-      </p:sp>
-      <p:sp>
-        <p:nvSpPr>
-          <p:cNvPr id="6" name="Text 4"/>
+              <a:t>Detectar, diagnosticar e corrigir — é exatamente pra isso que serve a Aula 4.</a:t>
+            </a:r>
+            <a:endParaRPr lang="en-US" sz="1300" dirty="0"/>
+          </a:p>
+        </p:txBody>
+      </p:sp>
+      <p:sp>
+        <p:nvSpPr>
+          <p:cNvPr id="8" name="Text 6"/>
           <p:cNvSpPr/>
           <p:nvPr/>
         </p:nvSpPr>
@@ -7388,6 +7753,451 @@
 <file path=ppt/slides/slide20.xml><?xml version="1.0" encoding="utf-8"?>
 <p:sld xmlns:a="http://schemas.openxmlformats.org/drawingml/2006/main" xmlns:r="http://schemas.openxmlformats.org/officeDocument/2006/relationships" xmlns:p="http://schemas.openxmlformats.org/presentationml/2006/main">
   <p:cSld name="Slide 20">
+    <p:bg>
+      <p:bgPr>
+        <a:solidFill>
+          <a:srgbClr val="0429BC"/>
+        </a:solidFill>
+      </p:bgPr>
+    </p:bg>
+    <p:spTree>
+      <p:nvGrpSpPr>
+        <p:cNvPr id="1" name=""/>
+        <p:cNvGrpSpPr/>
+        <p:nvPr/>
+      </p:nvGrpSpPr>
+      <p:grpSpPr>
+        <a:xfrm>
+          <a:off x="0" y="0"/>
+          <a:ext cx="0" cy="0"/>
+          <a:chOff x="0" y="0"/>
+          <a:chExt cx="0" cy="0"/>
+        </a:xfrm>
+      </p:grpSpPr>
+      <p:sp>
+        <p:nvSpPr>
+          <p:cNvPr id="2" name="Text 0"/>
+          <p:cNvSpPr/>
+          <p:nvPr/>
+        </p:nvSpPr>
+        <p:spPr>
+          <a:xfrm>
+            <a:off x="502920" y="1554480"/>
+            <a:ext cx="1828800" cy="914400"/>
+          </a:xfrm>
+          <a:prstGeom prst="rect">
+            <a:avLst/>
+          </a:prstGeom>
+          <a:noFill/>
+          <a:ln/>
+        </p:spPr>
+        <p:txBody>
+          <a:bodyPr wrap="square" rtlCol="0" anchor="ctr"/>
+          <a:lstStyle/>
+          <a:p>
+            <a:pPr indent="0" marL="0">
+              <a:buNone/>
+            </a:pPr>
+            <a:r>
+              <a:rPr lang="en-US" sz="2000" b="1" dirty="0">
+                <a:solidFill>
+                  <a:srgbClr val="F4F5F6">
+                    <a:alpha val="80000"/>
+                  </a:srgbClr>
+                </a:solidFill>
+                <a:latin typeface="Consolas" pitchFamily="34" charset="0"/>
+                <a:ea typeface="Consolas" pitchFamily="34" charset="-122"/>
+                <a:cs typeface="Consolas" pitchFamily="34" charset="-120"/>
+              </a:rPr>
+              <a:t>3.5</a:t>
+            </a:r>
+            <a:endParaRPr lang="en-US" sz="2000" dirty="0"/>
+          </a:p>
+        </p:txBody>
+      </p:sp>
+      <p:sp>
+        <p:nvSpPr>
+          <p:cNvPr id="3" name="Text 1"/>
+          <p:cNvSpPr/>
+          <p:nvPr/>
+        </p:nvSpPr>
+        <p:spPr>
+          <a:xfrm>
+            <a:off x="502920" y="1965960"/>
+            <a:ext cx="8138160" cy="1280160"/>
+          </a:xfrm>
+          <a:prstGeom prst="rect">
+            <a:avLst/>
+          </a:prstGeom>
+          <a:noFill/>
+          <a:ln/>
+        </p:spPr>
+        <p:txBody>
+          <a:bodyPr wrap="square" rtlCol="0" anchor="ctr"/>
+          <a:lstStyle/>
+          <a:p>
+            <a:pPr indent="0" marL="0">
+              <a:buNone/>
+            </a:pPr>
+            <a:r>
+              <a:rPr lang="en-US" sz="3400" b="1" dirty="0">
+                <a:solidFill>
+                  <a:srgbClr val="F4F5F6"/>
+                </a:solidFill>
+                <a:latin typeface="Arial" pitchFamily="34" charset="0"/>
+                <a:ea typeface="Arial" pitchFamily="34" charset="-122"/>
+                <a:cs typeface="Arial" pitchFamily="34" charset="-120"/>
+              </a:rPr>
+              <a:t>O que aprendemos?</a:t>
+            </a:r>
+            <a:endParaRPr lang="en-US" sz="3400" dirty="0"/>
+          </a:p>
+        </p:txBody>
+      </p:sp>
+      <p:sp>
+        <p:nvSpPr>
+          <p:cNvPr id="4" name="Text 2"/>
+          <p:cNvSpPr/>
+          <p:nvPr/>
+        </p:nvSpPr>
+        <p:spPr>
+          <a:xfrm>
+            <a:off x="502920" y="4800600"/>
+            <a:ext cx="8138160" cy="274320"/>
+          </a:xfrm>
+          <a:prstGeom prst="rect">
+            <a:avLst/>
+          </a:prstGeom>
+          <a:noFill/>
+          <a:ln/>
+        </p:spPr>
+        <p:txBody>
+          <a:bodyPr wrap="square" rtlCol="0" anchor="ctr"/>
+          <a:lstStyle/>
+          <a:p>
+            <a:pPr indent="0" marL="0">
+              <a:buNone/>
+            </a:pPr>
+            <a:r>
+              <a:rPr lang="en-US" sz="900" dirty="0">
+                <a:solidFill>
+                  <a:srgbClr val="010C53">
+                    <a:alpha val="60000"/>
+                  </a:srgbClr>
+                </a:solidFill>
+                <a:latin typeface="Arial" pitchFamily="34" charset="0"/>
+                <a:ea typeface="Arial" pitchFamily="34" charset="-122"/>
+                <a:cs typeface="Arial" pitchFamily="34" charset="-120"/>
+              </a:rPr>
+              <a:t>Aula 3 — Observabilidade: monitorando em produção — Evals, observabilidade e conformidade</a:t>
+            </a:r>
+            <a:endParaRPr lang="en-US" sz="900" dirty="0"/>
+          </a:p>
+        </p:txBody>
+      </p:sp>
+    </p:spTree>
+  </p:cSld>
+  <p:clrMapOvr>
+    <a:masterClrMapping/>
+  </p:clrMapOvr>
+</p:sld>
+</file>
+
+<file path=ppt/slides/slide21.xml><?xml version="1.0" encoding="utf-8"?>
+<p:sld xmlns:a="http://schemas.openxmlformats.org/drawingml/2006/main" xmlns:r="http://schemas.openxmlformats.org/officeDocument/2006/relationships" xmlns:p="http://schemas.openxmlformats.org/presentationml/2006/main">
+  <p:cSld name="Slide 21">
+    <p:bg>
+      <p:bgPr>
+        <a:solidFill>
+          <a:srgbClr val="F4F5F6"/>
+        </a:solidFill>
+      </p:bgPr>
+    </p:bg>
+    <p:spTree>
+      <p:nvGrpSpPr>
+        <p:cNvPr id="1" name=""/>
+        <p:cNvGrpSpPr/>
+        <p:nvPr/>
+      </p:nvGrpSpPr>
+      <p:grpSpPr>
+        <a:xfrm>
+          <a:off x="0" y="0"/>
+          <a:ext cx="0" cy="0"/>
+          <a:chOff x="0" y="0"/>
+          <a:chExt cx="0" cy="0"/>
+        </a:xfrm>
+      </p:grpSpPr>
+      <p:sp>
+        <p:nvSpPr>
+          <p:cNvPr id="2" name="Text 0"/>
+          <p:cNvSpPr/>
+          <p:nvPr/>
+        </p:nvSpPr>
+        <p:spPr>
+          <a:xfrm>
+            <a:off x="502920" y="365760"/>
+            <a:ext cx="8138160" cy="320040"/>
+          </a:xfrm>
+          <a:prstGeom prst="rect">
+            <a:avLst/>
+          </a:prstGeom>
+          <a:noFill/>
+          <a:ln/>
+        </p:spPr>
+        <p:txBody>
+          <a:bodyPr wrap="square" rtlCol="0" anchor="ctr"/>
+          <a:lstStyle/>
+          <a:p>
+            <a:pPr indent="0" marL="0">
+              <a:buNone/>
+            </a:pPr>
+            <a:r>
+              <a:rPr lang="en-US" sz="1100" b="1" spc="150" kern="0" dirty="0">
+                <a:solidFill>
+                  <a:srgbClr val="0429BC"/>
+                </a:solidFill>
+                <a:latin typeface="Arial" pitchFamily="34" charset="0"/>
+                <a:ea typeface="Arial" pitchFamily="34" charset="-122"/>
+                <a:cs typeface="Arial" pitchFamily="34" charset="-120"/>
+              </a:rPr>
+              <a:t>FECHAMENTO DA AULA</a:t>
+            </a:r>
+            <a:endParaRPr lang="en-US" sz="1100" dirty="0"/>
+          </a:p>
+        </p:txBody>
+      </p:sp>
+      <p:sp>
+        <p:nvSpPr>
+          <p:cNvPr id="3" name="Text 1"/>
+          <p:cNvSpPr/>
+          <p:nvPr/>
+        </p:nvSpPr>
+        <p:spPr>
+          <a:xfrm>
+            <a:off x="502920" y="713232"/>
+            <a:ext cx="8138160" cy="640080"/>
+          </a:xfrm>
+          <a:prstGeom prst="rect">
+            <a:avLst/>
+          </a:prstGeom>
+          <a:noFill/>
+          <a:ln/>
+        </p:spPr>
+        <p:txBody>
+          <a:bodyPr wrap="square" rtlCol="0" anchor="ctr"/>
+          <a:lstStyle/>
+          <a:p>
+            <a:pPr indent="0" marL="0">
+              <a:buNone/>
+            </a:pPr>
+            <a:r>
+              <a:rPr lang="en-US" sz="2600" b="1" dirty="0">
+                <a:solidFill>
+                  <a:srgbClr val="010C53"/>
+                </a:solidFill>
+                <a:latin typeface="Arial" pitchFamily="34" charset="0"/>
+                <a:ea typeface="Arial" pitchFamily="34" charset="-122"/>
+                <a:cs typeface="Arial" pitchFamily="34" charset="-120"/>
+              </a:rPr>
+              <a:t>O que aprendemos</a:t>
+            </a:r>
+            <a:endParaRPr lang="en-US" sz="2600" dirty="0"/>
+          </a:p>
+        </p:txBody>
+      </p:sp>
+      <p:sp>
+        <p:nvSpPr>
+          <p:cNvPr id="4" name="Shape 2"/>
+          <p:cNvSpPr/>
+          <p:nvPr/>
+        </p:nvSpPr>
+        <p:spPr>
+          <a:xfrm>
+            <a:off x="502920" y="1371600"/>
+            <a:ext cx="8138160" cy="0"/>
+          </a:xfrm>
+          <a:prstGeom prst="line">
+            <a:avLst/>
+          </a:prstGeom>
+          <a:noFill/>
+          <a:ln w="19050">
+            <a:solidFill>
+              <a:srgbClr val="010C53"/>
+            </a:solidFill>
+            <a:prstDash val="solid"/>
+          </a:ln>
+        </p:spPr>
+      </p:sp>
+      <p:sp>
+        <p:nvSpPr>
+          <p:cNvPr id="5" name="Text 3"/>
+          <p:cNvSpPr/>
+          <p:nvPr/>
+        </p:nvSpPr>
+        <p:spPr>
+          <a:xfrm>
+            <a:off x="502920" y="1600200"/>
+            <a:ext cx="8138160" cy="3044952"/>
+          </a:xfrm>
+          <a:prstGeom prst="rect">
+            <a:avLst/>
+          </a:prstGeom>
+          <a:noFill/>
+          <a:ln/>
+        </p:spPr>
+        <p:txBody>
+          <a:bodyPr wrap="square" rtlCol="0" anchor="t"/>
+          <a:lstStyle/>
+          <a:p>
+            <a:pPr marL="342900" indent="-342900">
+              <a:lnSpc>
+                <a:spcPct val="115000"/>
+              </a:lnSpc>
+              <a:spcAft>
+                <a:spcPts val="1000"/>
+              </a:spcAft>
+              <a:buSzPct val="100000"/>
+              <a:buChar char="•"/>
+            </a:pPr>
+            <a:r>
+              <a:rPr lang="en-US" sz="1500" dirty="0">
+                <a:solidFill>
+                  <a:srgbClr val="011676"/>
+                </a:solidFill>
+                <a:latin typeface="Arial" pitchFamily="34" charset="0"/>
+                <a:ea typeface="Arial" pitchFamily="34" charset="-122"/>
+                <a:cs typeface="Arial" pitchFamily="34" charset="-120"/>
+              </a:rPr>
+              <a:t>Observabilidade é reconstruir a causa, não só registrar o evento — no Chef Caseiro é invariante de código.</a:t>
+            </a:r>
+            <a:endParaRPr lang="en-US" sz="1500" dirty="0"/>
+          </a:p>
+          <a:p>
+            <a:pPr marL="342900" indent="-342900">
+              <a:lnSpc>
+                <a:spcPct val="115000"/>
+              </a:lnSpc>
+              <a:spcAft>
+                <a:spcPts val="1000"/>
+              </a:spcAft>
+              <a:buSzPct val="100000"/>
+              <a:buChar char="•"/>
+            </a:pPr>
+            <a:r>
+              <a:rPr lang="en-US" sz="1500" dirty="0">
+                <a:solidFill>
+                  <a:srgbClr val="011676"/>
+                </a:solidFill>
+                <a:latin typeface="Arial" pitchFamily="34" charset="0"/>
+                <a:ea typeface="Arial" pitchFamily="34" charset="-122"/>
+                <a:cs typeface="Arial" pitchFamily="34" charset="-120"/>
+              </a:rPr>
+              <a:t>Trace → observation → generation é a estrutura de dados do Langfuse.</a:t>
+            </a:r>
+            <a:endParaRPr lang="en-US" sz="1500" dirty="0"/>
+          </a:p>
+          <a:p>
+            <a:pPr marL="342900" indent="-342900">
+              <a:lnSpc>
+                <a:spcPct val="115000"/>
+              </a:lnSpc>
+              <a:spcAft>
+                <a:spcPts val="1000"/>
+              </a:spcAft>
+              <a:buSzPct val="100000"/>
+              <a:buChar char="•"/>
+            </a:pPr>
+            <a:r>
+              <a:rPr lang="en-US" sz="1500" b="1" dirty="0">
+                <a:solidFill>
+                  <a:srgbClr val="011676"/>
+                </a:solidFill>
+                <a:latin typeface="Arial" pitchFamily="34" charset="0"/>
+                <a:ea typeface="Arial" pitchFamily="34" charset="-122"/>
+                <a:cs typeface="Arial" pitchFamily="34" charset="-120"/>
+              </a:rPr>
+              <a:t>Dado real (68 traces, US$ 1,65) mostra onde o custo se concentra e onde trocar de modelo compensa.</a:t>
+            </a:r>
+            <a:endParaRPr lang="en-US" sz="1500" dirty="0"/>
+          </a:p>
+          <a:p>
+            <a:pPr marL="342900" indent="-342900">
+              <a:lnSpc>
+                <a:spcPct val="115000"/>
+              </a:lnSpc>
+              <a:spcAft>
+                <a:spcPts val="1000"/>
+              </a:spcAft>
+              <a:buSzPct val="100000"/>
+              <a:buChar char="•"/>
+            </a:pPr>
+            <a:r>
+              <a:rPr lang="en-US" sz="1500" dirty="0">
+                <a:solidFill>
+                  <a:srgbClr val="011676"/>
+                </a:solidFill>
+                <a:latin typeface="Arial" pitchFamily="34" charset="0"/>
+                <a:ea typeface="Arial" pitchFamily="34" charset="-122"/>
+                <a:cs typeface="Arial" pitchFamily="34" charset="-120"/>
+              </a:rPr>
+              <a:t>Quatro padrões de falha documentados — nenhum gritou sozinho.</a:t>
+            </a:r>
+            <a:endParaRPr lang="en-US" sz="1500" dirty="0"/>
+          </a:p>
+        </p:txBody>
+      </p:sp>
+      <p:sp>
+        <p:nvSpPr>
+          <p:cNvPr id="6" name="Text 4"/>
+          <p:cNvSpPr/>
+          <p:nvPr/>
+        </p:nvSpPr>
+        <p:spPr>
+          <a:xfrm>
+            <a:off x="502920" y="4800600"/>
+            <a:ext cx="8138160" cy="274320"/>
+          </a:xfrm>
+          <a:prstGeom prst="rect">
+            <a:avLst/>
+          </a:prstGeom>
+          <a:noFill/>
+          <a:ln/>
+        </p:spPr>
+        <p:txBody>
+          <a:bodyPr wrap="square" rtlCol="0" anchor="ctr"/>
+          <a:lstStyle/>
+          <a:p>
+            <a:pPr indent="0" marL="0">
+              <a:buNone/>
+            </a:pPr>
+            <a:r>
+              <a:rPr lang="en-US" sz="900" dirty="0">
+                <a:solidFill>
+                  <a:srgbClr val="010C53">
+                    <a:alpha val="60000"/>
+                  </a:srgbClr>
+                </a:solidFill>
+                <a:latin typeface="Arial" pitchFamily="34" charset="0"/>
+                <a:ea typeface="Arial" pitchFamily="34" charset="-122"/>
+                <a:cs typeface="Arial" pitchFamily="34" charset="-120"/>
+              </a:rPr>
+              <a:t>Aula 3 — Observabilidade: monitorando em produção — Evals, observabilidade e conformidade</a:t>
+            </a:r>
+            <a:endParaRPr lang="en-US" sz="900" dirty="0"/>
+          </a:p>
+        </p:txBody>
+      </p:sp>
+    </p:spTree>
+  </p:cSld>
+  <p:clrMapOvr>
+    <a:masterClrMapping/>
+  </p:clrMapOvr>
+</p:sld>
+</file>
+
+<file path=ppt/slides/slide22.xml><?xml version="1.0" encoding="utf-8"?>
+<p:sld xmlns:a="http://schemas.openxmlformats.org/drawingml/2006/main" xmlns:r="http://schemas.openxmlformats.org/officeDocument/2006/relationships" xmlns:p="http://schemas.openxmlformats.org/presentationml/2006/main">
+  <p:cSld name="Slide 22">
     <p:bg>
       <p:bgPr>
         <a:solidFill>
